--- a/pptx_nested.pptx
+++ b/pptx_nested.pptx
@@ -3090,22 +3090,22 @@
       <p:grpSpPr/>
       <p:sp>
         <p:nvSpPr>
-          <p:cNvPr id="2" name="Rounded Rectangle 1"/>
+          <p:cNvPr id="2" name="Rectangle 1"/>
           <p:cNvSpPr/>
           <p:nvPr/>
         </p:nvSpPr>
         <p:spPr>
           <a:xfrm>
-            <a:off x="5088636" y="457200"/>
-            <a:ext cx="2011680" cy="777240"/>
+            <a:off x="4448556" y="457200"/>
+            <a:ext cx="1119225" cy="822960"/>
           </a:xfrm>
-          <a:prstGeom prst="roundRect">
+          <a:prstGeom prst="rect">
             <a:avLst/>
           </a:prstGeom>
           <a:solidFill>
-            <a:srgbClr val="F5F7FA"/>
+            <a:srgbClr val="D2E1F5"/>
           </a:solidFill>
-          <a:ln w="12700">
+          <a:ln w="9525">
             <a:solidFill>
               <a:srgbClr val="78828C"/>
             </a:solidFill>
@@ -3126,49 +3126,39 @@
           </a:fontRef>
         </p:style>
         <p:txBody>
-          <a:bodyPr rtlCol="0" anchor="ctr" wrap="square" lIns="73152" rIns="73152"/>
+          <a:bodyPr rtlCol="0" anchor="ctr" wrap="square"/>
           <a:lstStyle/>
           <a:p>
             <a:pPr algn="ctr"/>
             <a:r>
-              <a:rPr sz="1400" b="1">
+              <a:rPr sz="1100" b="1">
                 <a:solidFill>
-                  <a:srgbClr val="1E2328"/>
+                  <a:srgbClr val="1E1E1E"/>
                 </a:solidFill>
               </a:rPr>
               <a:t>Alex Tan</a:t>
             </a:r>
           </a:p>
-          <a:p>
-            <a:r>
-              <a:rPr sz="1100" b="0">
-                <a:solidFill>
-                  <a:srgbClr val="1E2328"/>
-                </a:solidFill>
-              </a:rPr>
-              <a:t>CEO</a:t>
-            </a:r>
-          </a:p>
-        </p:txBody>
-      </p:sp>
-      <p:sp>
-        <p:nvSpPr>
-          <p:cNvPr id="3" name="Rounded Rectangle 2"/>
+        </p:txBody>
+      </p:sp>
+      <p:sp>
+        <p:nvSpPr>
+          <p:cNvPr id="3" name="Rectangle 2"/>
           <p:cNvSpPr/>
           <p:nvPr/>
         </p:nvSpPr>
         <p:spPr>
           <a:xfrm>
-            <a:off x="2269998" y="1554480"/>
-            <a:ext cx="2011680" cy="777240"/>
+            <a:off x="5567781" y="457200"/>
+            <a:ext cx="1086307" cy="822960"/>
           </a:xfrm>
-          <a:prstGeom prst="roundRect">
+          <a:prstGeom prst="rect">
             <a:avLst/>
           </a:prstGeom>
           <a:solidFill>
-            <a:srgbClr val="F5F7FA"/>
+            <a:srgbClr val="EBEBEB"/>
           </a:solidFill>
-          <a:ln w="12700">
+          <a:ln w="9525">
             <a:solidFill>
               <a:srgbClr val="78828C"/>
             </a:solidFill>
@@ -3189,49 +3179,39 @@
           </a:fontRef>
         </p:style>
         <p:txBody>
-          <a:bodyPr rtlCol="0" anchor="ctr" wrap="square" lIns="73152" rIns="73152"/>
+          <a:bodyPr rtlCol="0" anchor="ctr" wrap="square"/>
           <a:lstStyle/>
           <a:p>
             <a:pPr algn="ctr"/>
             <a:r>
-              <a:rPr sz="1400" b="1">
+              <a:rPr sz="1100" b="0">
                 <a:solidFill>
-                  <a:srgbClr val="1E2328"/>
+                  <a:srgbClr val="1E1E1E"/>
                 </a:solidFill>
               </a:rPr>
-              <a:t>Mei Chen</a:t>
-            </a:r>
-          </a:p>
-          <a:p>
-            <a:r>
-              <a:rPr sz="1100" b="0">
-                <a:solidFill>
-                  <a:srgbClr val="1E2328"/>
-                </a:solidFill>
-              </a:rPr>
-              <a:t>CTO</a:t>
-            </a:r>
-          </a:p>
-        </p:txBody>
-      </p:sp>
-      <p:sp>
-        <p:nvSpPr>
-          <p:cNvPr id="4" name="Rounded Rectangle 3"/>
+              <a:t/>
+            </a:r>
+          </a:p>
+        </p:txBody>
+      </p:sp>
+      <p:sp>
+        <p:nvSpPr>
+          <p:cNvPr id="4" name="Rectangle 3"/>
           <p:cNvSpPr/>
           <p:nvPr/>
         </p:nvSpPr>
         <p:spPr>
           <a:xfrm>
-            <a:off x="2269998" y="2651760"/>
-            <a:ext cx="2011680" cy="777240"/>
+            <a:off x="6654088" y="457200"/>
+            <a:ext cx="1086307" cy="822960"/>
           </a:xfrm>
-          <a:prstGeom prst="roundRect">
+          <a:prstGeom prst="rect">
             <a:avLst/>
           </a:prstGeom>
           <a:solidFill>
-            <a:srgbClr val="F5F7FA"/>
+            <a:srgbClr val="F5F0DC"/>
           </a:solidFill>
-          <a:ln w="12700">
+          <a:ln w="9525">
             <a:solidFill>
               <a:srgbClr val="78828C"/>
             </a:solidFill>
@@ -3252,49 +3232,39 @@
           </a:fontRef>
         </p:style>
         <p:txBody>
-          <a:bodyPr rtlCol="0" anchor="ctr" wrap="square" lIns="73152" rIns="73152"/>
+          <a:bodyPr rtlCol="0" anchor="ctr" wrap="square"/>
           <a:lstStyle/>
           <a:p>
             <a:pPr algn="ctr"/>
             <a:r>
-              <a:rPr sz="1400" b="1">
+              <a:rPr sz="1100" b="0">
                 <a:solidFill>
-                  <a:srgbClr val="1E2328"/>
+                  <a:srgbClr val="1E1E1E"/>
                 </a:solidFill>
               </a:rPr>
-              <a:t>Iris Lim</a:t>
-            </a:r>
-          </a:p>
-          <a:p>
-            <a:r>
-              <a:rPr sz="1100" b="0">
-                <a:solidFill>
-                  <a:srgbClr val="1E2328"/>
-                </a:solidFill>
-              </a:rPr>
-              <a:t>Eng Manager</a:t>
-            </a:r>
-          </a:p>
-        </p:txBody>
-      </p:sp>
-      <p:sp>
-        <p:nvSpPr>
-          <p:cNvPr id="5" name="Rounded Rectangle 4"/>
+              <a:t>CEO</a:t>
+            </a:r>
+          </a:p>
+        </p:txBody>
+      </p:sp>
+      <p:sp>
+        <p:nvSpPr>
+          <p:cNvPr id="5" name="Rectangle 4"/>
           <p:cNvSpPr/>
           <p:nvPr/>
         </p:nvSpPr>
         <p:spPr>
           <a:xfrm>
-            <a:off x="7907274" y="1554480"/>
-            <a:ext cx="2011680" cy="777240"/>
+            <a:off x="2665476" y="1645920"/>
+            <a:ext cx="1119225" cy="822960"/>
           </a:xfrm>
-          <a:prstGeom prst="roundRect">
+          <a:prstGeom prst="rect">
             <a:avLst/>
           </a:prstGeom>
           <a:solidFill>
-            <a:srgbClr val="F5F7FA"/>
+            <a:srgbClr val="D2E1F5"/>
           </a:solidFill>
-          <a:ln w="12700">
+          <a:ln w="9525">
             <a:solidFill>
               <a:srgbClr val="78828C"/>
             </a:solidFill>
@@ -3315,24 +3285,438 @@
           </a:fontRef>
         </p:style>
         <p:txBody>
-          <a:bodyPr rtlCol="0" anchor="ctr" wrap="square" lIns="73152" rIns="73152"/>
+          <a:bodyPr rtlCol="0" anchor="ctr" wrap="square"/>
           <a:lstStyle/>
           <a:p>
             <a:pPr algn="ctr"/>
             <a:r>
-              <a:rPr sz="1400" b="1">
+              <a:rPr sz="1100" b="1">
                 <a:solidFill>
-                  <a:srgbClr val="1E2328"/>
+                  <a:srgbClr val="1E1E1E"/>
+                </a:solidFill>
+              </a:rPr>
+              <a:t>Mei Chen</a:t>
+            </a:r>
+          </a:p>
+        </p:txBody>
+      </p:sp>
+      <p:sp>
+        <p:nvSpPr>
+          <p:cNvPr id="6" name="Rectangle 5"/>
+          <p:cNvSpPr/>
+          <p:nvPr/>
+        </p:nvSpPr>
+        <p:spPr>
+          <a:xfrm>
+            <a:off x="3784701" y="1645920"/>
+            <a:ext cx="1086307" cy="822960"/>
+          </a:xfrm>
+          <a:prstGeom prst="rect">
+            <a:avLst/>
+          </a:prstGeom>
+          <a:solidFill>
+            <a:srgbClr val="EBEBEB"/>
+          </a:solidFill>
+          <a:ln w="9525">
+            <a:solidFill>
+              <a:srgbClr val="78828C"/>
+            </a:solidFill>
+          </a:ln>
+        </p:spPr>
+        <p:style>
+          <a:lnRef idx="1">
+            <a:schemeClr val="accent1"/>
+          </a:lnRef>
+          <a:fillRef idx="3">
+            <a:schemeClr val="accent1"/>
+          </a:fillRef>
+          <a:effectRef idx="2">
+            <a:schemeClr val="accent1"/>
+          </a:effectRef>
+          <a:fontRef idx="minor">
+            <a:schemeClr val="lt1"/>
+          </a:fontRef>
+        </p:style>
+        <p:txBody>
+          <a:bodyPr rtlCol="0" anchor="ctr" wrap="square"/>
+          <a:lstStyle/>
+          <a:p>
+            <a:pPr algn="ctr"/>
+            <a:r>
+              <a:rPr sz="1100" b="0">
+                <a:solidFill>
+                  <a:srgbClr val="1E1E1E"/>
+                </a:solidFill>
+              </a:rPr>
+              <a:t/>
+            </a:r>
+          </a:p>
+        </p:txBody>
+      </p:sp>
+      <p:sp>
+        <p:nvSpPr>
+          <p:cNvPr id="7" name="Rectangle 6"/>
+          <p:cNvSpPr/>
+          <p:nvPr/>
+        </p:nvSpPr>
+        <p:spPr>
+          <a:xfrm>
+            <a:off x="4871008" y="1645920"/>
+            <a:ext cx="1086307" cy="822960"/>
+          </a:xfrm>
+          <a:prstGeom prst="rect">
+            <a:avLst/>
+          </a:prstGeom>
+          <a:solidFill>
+            <a:srgbClr val="F5F0DC"/>
+          </a:solidFill>
+          <a:ln w="9525">
+            <a:solidFill>
+              <a:srgbClr val="78828C"/>
+            </a:solidFill>
+          </a:ln>
+        </p:spPr>
+        <p:style>
+          <a:lnRef idx="1">
+            <a:schemeClr val="accent1"/>
+          </a:lnRef>
+          <a:fillRef idx="3">
+            <a:schemeClr val="accent1"/>
+          </a:fillRef>
+          <a:effectRef idx="2">
+            <a:schemeClr val="accent1"/>
+          </a:effectRef>
+          <a:fontRef idx="minor">
+            <a:schemeClr val="lt1"/>
+          </a:fontRef>
+        </p:style>
+        <p:txBody>
+          <a:bodyPr rtlCol="0" anchor="ctr" wrap="square"/>
+          <a:lstStyle/>
+          <a:p>
+            <a:pPr algn="ctr"/>
+            <a:r>
+              <a:rPr sz="1100" b="0">
+                <a:solidFill>
+                  <a:srgbClr val="1E1E1E"/>
+                </a:solidFill>
+              </a:rPr>
+              <a:t>CTO</a:t>
+            </a:r>
+          </a:p>
+        </p:txBody>
+      </p:sp>
+      <p:sp>
+        <p:nvSpPr>
+          <p:cNvPr id="8" name="Rectangle 7"/>
+          <p:cNvSpPr/>
+          <p:nvPr/>
+        </p:nvSpPr>
+        <p:spPr>
+          <a:xfrm>
+            <a:off x="457199" y="2834640"/>
+            <a:ext cx="1119225" cy="822960"/>
+          </a:xfrm>
+          <a:prstGeom prst="rect">
+            <a:avLst/>
+          </a:prstGeom>
+          <a:solidFill>
+            <a:srgbClr val="D2E1F5"/>
+          </a:solidFill>
+          <a:ln w="9525">
+            <a:solidFill>
+              <a:srgbClr val="78828C"/>
+            </a:solidFill>
+          </a:ln>
+        </p:spPr>
+        <p:style>
+          <a:lnRef idx="1">
+            <a:schemeClr val="accent1"/>
+          </a:lnRef>
+          <a:fillRef idx="3">
+            <a:schemeClr val="accent1"/>
+          </a:fillRef>
+          <a:effectRef idx="2">
+            <a:schemeClr val="accent1"/>
+          </a:effectRef>
+          <a:fontRef idx="minor">
+            <a:schemeClr val="lt1"/>
+          </a:fontRef>
+        </p:style>
+        <p:txBody>
+          <a:bodyPr rtlCol="0" anchor="ctr" wrap="square"/>
+          <a:lstStyle/>
+          <a:p>
+            <a:pPr algn="ctr"/>
+            <a:r>
+              <a:rPr sz="1100" b="1">
+                <a:solidFill>
+                  <a:srgbClr val="1E1E1E"/>
+                </a:solidFill>
+              </a:rPr>
+              <a:t>Iris Lim</a:t>
+            </a:r>
+          </a:p>
+        </p:txBody>
+      </p:sp>
+      <p:sp>
+        <p:nvSpPr>
+          <p:cNvPr id="9" name="Rectangle 8"/>
+          <p:cNvSpPr/>
+          <p:nvPr/>
+        </p:nvSpPr>
+        <p:spPr>
+          <a:xfrm>
+            <a:off x="1576425" y="2834640"/>
+            <a:ext cx="1086307" cy="822960"/>
+          </a:xfrm>
+          <a:prstGeom prst="rect">
+            <a:avLst/>
+          </a:prstGeom>
+          <a:solidFill>
+            <a:srgbClr val="EBEBEB"/>
+          </a:solidFill>
+          <a:ln w="9525">
+            <a:solidFill>
+              <a:srgbClr val="78828C"/>
+            </a:solidFill>
+          </a:ln>
+        </p:spPr>
+        <p:style>
+          <a:lnRef idx="1">
+            <a:schemeClr val="accent1"/>
+          </a:lnRef>
+          <a:fillRef idx="3">
+            <a:schemeClr val="accent1"/>
+          </a:fillRef>
+          <a:effectRef idx="2">
+            <a:schemeClr val="accent1"/>
+          </a:effectRef>
+          <a:fontRef idx="minor">
+            <a:schemeClr val="lt1"/>
+          </a:fontRef>
+        </p:style>
+        <p:txBody>
+          <a:bodyPr rtlCol="0" anchor="ctr" wrap="square"/>
+          <a:lstStyle/>
+          <a:p>
+            <a:pPr algn="ctr"/>
+            <a:r>
+              <a:rPr sz="1100" b="0">
+                <a:solidFill>
+                  <a:srgbClr val="1E1E1E"/>
+                </a:solidFill>
+              </a:rPr>
+              <a:t/>
+            </a:r>
+          </a:p>
+        </p:txBody>
+      </p:sp>
+      <p:sp>
+        <p:nvSpPr>
+          <p:cNvPr id="10" name="Rectangle 9"/>
+          <p:cNvSpPr/>
+          <p:nvPr/>
+        </p:nvSpPr>
+        <p:spPr>
+          <a:xfrm>
+            <a:off x="2662732" y="2834640"/>
+            <a:ext cx="1086307" cy="822960"/>
+          </a:xfrm>
+          <a:prstGeom prst="rect">
+            <a:avLst/>
+          </a:prstGeom>
+          <a:solidFill>
+            <a:srgbClr val="F5F0DC"/>
+          </a:solidFill>
+          <a:ln w="9525">
+            <a:solidFill>
+              <a:srgbClr val="78828C"/>
+            </a:solidFill>
+          </a:ln>
+        </p:spPr>
+        <p:style>
+          <a:lnRef idx="1">
+            <a:schemeClr val="accent1"/>
+          </a:lnRef>
+          <a:fillRef idx="3">
+            <a:schemeClr val="accent1"/>
+          </a:fillRef>
+          <a:effectRef idx="2">
+            <a:schemeClr val="accent1"/>
+          </a:effectRef>
+          <a:fontRef idx="minor">
+            <a:schemeClr val="lt1"/>
+          </a:fontRef>
+        </p:style>
+        <p:txBody>
+          <a:bodyPr rtlCol="0" anchor="ctr" wrap="square"/>
+          <a:lstStyle/>
+          <a:p>
+            <a:pPr algn="ctr"/>
+            <a:r>
+              <a:rPr sz="1100" b="0">
+                <a:solidFill>
+                  <a:srgbClr val="1E1E1E"/>
+                </a:solidFill>
+              </a:rPr>
+              <a:t>Eng Manager</a:t>
+            </a:r>
+          </a:p>
+        </p:txBody>
+      </p:sp>
+      <p:sp>
+        <p:nvSpPr>
+          <p:cNvPr id="11" name="Rectangle 10"/>
+          <p:cNvSpPr/>
+          <p:nvPr/>
+        </p:nvSpPr>
+        <p:spPr>
+          <a:xfrm>
+            <a:off x="6231636" y="1645920"/>
+            <a:ext cx="1119225" cy="822960"/>
+          </a:xfrm>
+          <a:prstGeom prst="rect">
+            <a:avLst/>
+          </a:prstGeom>
+          <a:solidFill>
+            <a:srgbClr val="D2E1F5"/>
+          </a:solidFill>
+          <a:ln w="9525">
+            <a:solidFill>
+              <a:srgbClr val="78828C"/>
+            </a:solidFill>
+          </a:ln>
+        </p:spPr>
+        <p:style>
+          <a:lnRef idx="1">
+            <a:schemeClr val="accent1"/>
+          </a:lnRef>
+          <a:fillRef idx="3">
+            <a:schemeClr val="accent1"/>
+          </a:fillRef>
+          <a:effectRef idx="2">
+            <a:schemeClr val="accent1"/>
+          </a:effectRef>
+          <a:fontRef idx="minor">
+            <a:schemeClr val="lt1"/>
+          </a:fontRef>
+        </p:style>
+        <p:txBody>
+          <a:bodyPr rtlCol="0" anchor="ctr" wrap="square"/>
+          <a:lstStyle/>
+          <a:p>
+            <a:pPr algn="ctr"/>
+            <a:r>
+              <a:rPr sz="1100" b="1">
+                <a:solidFill>
+                  <a:srgbClr val="1E1E1E"/>
                 </a:solidFill>
               </a:rPr>
               <a:t>Ravi Kumar</a:t>
             </a:r>
           </a:p>
-          <a:p>
+        </p:txBody>
+      </p:sp>
+      <p:sp>
+        <p:nvSpPr>
+          <p:cNvPr id="12" name="Rectangle 11"/>
+          <p:cNvSpPr/>
+          <p:nvPr/>
+        </p:nvSpPr>
+        <p:spPr>
+          <a:xfrm>
+            <a:off x="7350861" y="1645920"/>
+            <a:ext cx="1086307" cy="822960"/>
+          </a:xfrm>
+          <a:prstGeom prst="rect">
+            <a:avLst/>
+          </a:prstGeom>
+          <a:solidFill>
+            <a:srgbClr val="EBEBEB"/>
+          </a:solidFill>
+          <a:ln w="9525">
+            <a:solidFill>
+              <a:srgbClr val="78828C"/>
+            </a:solidFill>
+          </a:ln>
+        </p:spPr>
+        <p:style>
+          <a:lnRef idx="1">
+            <a:schemeClr val="accent1"/>
+          </a:lnRef>
+          <a:fillRef idx="3">
+            <a:schemeClr val="accent1"/>
+          </a:fillRef>
+          <a:effectRef idx="2">
+            <a:schemeClr val="accent1"/>
+          </a:effectRef>
+          <a:fontRef idx="minor">
+            <a:schemeClr val="lt1"/>
+          </a:fontRef>
+        </p:style>
+        <p:txBody>
+          <a:bodyPr rtlCol="0" anchor="ctr" wrap="square"/>
+          <a:lstStyle/>
+          <a:p>
+            <a:pPr algn="ctr"/>
             <a:r>
               <a:rPr sz="1100" b="0">
                 <a:solidFill>
-                  <a:srgbClr val="1E2328"/>
+                  <a:srgbClr val="1E1E1E"/>
+                </a:solidFill>
+              </a:rPr>
+              <a:t/>
+            </a:r>
+          </a:p>
+        </p:txBody>
+      </p:sp>
+      <p:sp>
+        <p:nvSpPr>
+          <p:cNvPr id="13" name="Rectangle 12"/>
+          <p:cNvSpPr/>
+          <p:nvPr/>
+        </p:nvSpPr>
+        <p:spPr>
+          <a:xfrm>
+            <a:off x="8437168" y="1645920"/>
+            <a:ext cx="1086307" cy="822960"/>
+          </a:xfrm>
+          <a:prstGeom prst="rect">
+            <a:avLst/>
+          </a:prstGeom>
+          <a:solidFill>
+            <a:srgbClr val="F5F0DC"/>
+          </a:solidFill>
+          <a:ln w="9525">
+            <a:solidFill>
+              <a:srgbClr val="78828C"/>
+            </a:solidFill>
+          </a:ln>
+        </p:spPr>
+        <p:style>
+          <a:lnRef idx="1">
+            <a:schemeClr val="accent1"/>
+          </a:lnRef>
+          <a:fillRef idx="3">
+            <a:schemeClr val="accent1"/>
+          </a:fillRef>
+          <a:effectRef idx="2">
+            <a:schemeClr val="accent1"/>
+          </a:effectRef>
+          <a:fontRef idx="minor">
+            <a:schemeClr val="lt1"/>
+          </a:fontRef>
+        </p:style>
+        <p:txBody>
+          <a:bodyPr rtlCol="0" anchor="ctr" wrap="square"/>
+          <a:lstStyle/>
+          <a:p>
+            <a:pPr algn="ctr"/>
+            <a:r>
+              <a:rPr sz="1100" b="0">
+                <a:solidFill>
+                  <a:srgbClr val="1E1E1E"/>
                 </a:solidFill>
               </a:rPr>
               <a:t>CFO</a:t>
@@ -3342,23 +3726,18 @@
       </p:sp>
       <p:cxnSp>
         <p:nvCxnSpPr>
-          <p:cNvPr id="6" name="Connector 5"/>
+          <p:cNvPr id="14" name="Connector 13"/>
           <p:cNvCxnSpPr/>
           <p:nvPr/>
         </p:nvCxnSpPr>
         <p:spPr>
           <a:xfrm flipH="1">
-            <a:off x="3275838" y="1234440"/>
-            <a:ext cx="2818638" cy="320040"/>
+            <a:off x="4327854.5" y="1280160"/>
+            <a:ext cx="1783080.0" cy="365760"/>
           </a:xfrm>
           <a:prstGeom prst="line">
             <a:avLst/>
           </a:prstGeom>
-          <a:ln w="12700">
-            <a:solidFill>
-              <a:srgbClr val="78828C"/>
-            </a:solidFill>
-          </a:ln>
         </p:spPr>
         <p:style>
           <a:lnRef idx="2">
@@ -3377,23 +3756,18 @@
       </p:cxnSp>
       <p:cxnSp>
         <p:nvCxnSpPr>
-          <p:cNvPr id="7" name="Connector 6"/>
+          <p:cNvPr id="15" name="Connector 14"/>
           <p:cNvCxnSpPr/>
           <p:nvPr/>
         </p:nvCxnSpPr>
         <p:spPr>
           <a:xfrm>
-            <a:off x="3275838" y="2331720"/>
-            <a:ext cx="0" cy="320040"/>
+            <a:off x="6110934.5" y="1280160"/>
+            <a:ext cx="1783080.0" cy="365760"/>
           </a:xfrm>
           <a:prstGeom prst="line">
             <a:avLst/>
           </a:prstGeom>
-          <a:ln w="12700">
-            <a:solidFill>
-              <a:srgbClr val="78828C"/>
-            </a:solidFill>
-          </a:ln>
         </p:spPr>
         <p:style>
           <a:lnRef idx="2">
@@ -3412,23 +3786,18 @@
       </p:cxnSp>
       <p:cxnSp>
         <p:nvCxnSpPr>
-          <p:cNvPr id="8" name="Connector 7"/>
+          <p:cNvPr id="16" name="Connector 15"/>
           <p:cNvCxnSpPr/>
           <p:nvPr/>
         </p:nvCxnSpPr>
         <p:spPr>
-          <a:xfrm>
-            <a:off x="6094476" y="1234440"/>
-            <a:ext cx="2818638" cy="320040"/>
+          <a:xfrm flipH="1">
+            <a:off x="2119578.5" y="2468880"/>
+            <a:ext cx="2208276.0" cy="365760"/>
           </a:xfrm>
           <a:prstGeom prst="line">
             <a:avLst/>
           </a:prstGeom>
-          <a:ln w="12700">
-            <a:solidFill>
-              <a:srgbClr val="78828C"/>
-            </a:solidFill>
-          </a:ln>
         </p:spPr>
         <p:style>
           <a:lnRef idx="2">
